--- a/it/slides/07-Architettura_dei_Calcolatori-Verm1_Parte_1-Lab.pptx
+++ b/it/slides/07-Architettura_dei_Calcolatori-Verm1_Parte_1-Lab.pptx
@@ -124,19 +124,19 @@
   <p:extLst>
     <p:ext uri="{521415D9-36F7-43E2-AB2F-B90AF26B5E84}">
       <p14:sectionLst xmlns:p14="http://schemas.microsoft.com/office/powerpoint/2010/main">
-        <p14:section name="Apertura" id="{4e60b8b0-8a75-e9b3-d2c0-83ced70b59e5}">
+        <p14:section name="Apertura" id="{2fc9def3-0a9c-ceb4-3573-3ea3d1305276}">
           <p14:sldIdLst>
             <p14:sldId id="256"/>
             <p14:sldId id="257"/>
           </p14:sldIdLst>
         </p14:section>
-        <p14:section name="Passo 0: il ciclo di lavoro" id="{d3323798-6e84-ac65-4442-e838539066e4}">
+        <p14:section name="Passo 0: il ciclo di lavoro" id="{aec4a785-5289-cce8-16a0-eacb18fd611f}">
           <p14:sldIdLst>
             <p14:sldId id="258"/>
             <p14:sldId id="259"/>
           </p14:sldIdLst>
         </p14:section>
-        <p14:section name="Passo 2: una griglia e una testa" id="{e1e98bfa-c80f-cbb2-06e9-07a0f1cc81a7}">
+        <p14:section name="Passo 2: una griglia e una testa" id="{1c025bf8-719a-1870-fcfc-06a99aca0b36}">
           <p14:sldIdLst>
             <p14:sldId id="260"/>
             <p14:sldId id="261"/>
@@ -145,18 +145,18 @@
             <p14:sldId id="264"/>
           </p14:sldIdLst>
         </p14:section>
-        <p14:section name="Passo 3: il movimento" id="{ca275fc5-d74e-d211-534e-067414c9547f}">
+        <p14:section name="Passo 3: il movimento" id="{531ff26d-e765-644f-47c2-121078c5774b}">
           <p14:sldIdLst>
             <p14:sldId id="265"/>
             <p14:sldId id="266"/>
           </p14:sldIdLst>
         </p14:section>
-        <p14:section name="Passo 4: guardare dentro con PRG32-QT" id="{a512eb87-7190-a6d5-48a4-5ba5e563b3cc}">
+        <p14:section name="Passo 4: guardare dentro con PRG32-QT" id="{c26eb167-569a-ab07-34ea-8a29de948bf8}">
           <p14:sldIdLst>
             <p14:sldId id="267"/>
           </p14:sldIdLst>
         </p14:section>
-        <p14:section name="Eseguire e provare" id="{7053b983-479a-7f2e-a7e7-cc980340a9f2}">
+        <p14:section name="Eseguire e provare" id="{45f9ef7c-6cfc-8cf5-bd86-cc26fff46c96}">
           <p14:sldIdLst>
             <p14:sldId id="268"/>
             <p14:sldId id="269"/>
@@ -165,7 +165,7 @@
             <p14:sldId id="272"/>
           </p14:sldIdLst>
         </p14:section>
-        <p14:section name="Esercizi" id="{fd0a20e8-f586-7a27-57f2-56b2ae0aa40c}">
+        <p14:section name="Esercizi" id="{c82853e4-928f-fc49-bc6e-e6e6f21aea45}">
           <p14:sldIdLst>
             <p14:sldId id="273"/>
           </p14:sldIdLst>

--- a/it/slides/07-Architettura_dei_Calcolatori-Verm1_Parte_1-Lab.pptx
+++ b/it/slides/07-Architettura_dei_Calcolatori-Verm1_Parte_1-Lab.pptx
@@ -124,19 +124,19 @@
   <p:extLst>
     <p:ext uri="{521415D9-36F7-43E2-AB2F-B90AF26B5E84}">
       <p14:sectionLst xmlns:p14="http://schemas.microsoft.com/office/powerpoint/2010/main">
-        <p14:section name="Apertura" id="{2fc9def3-0a9c-ceb4-3573-3ea3d1305276}">
+        <p14:section name="Apertura" id="{05a9e9df-56d3-eebb-11fb-04f84cd2c73a}">
           <p14:sldIdLst>
             <p14:sldId id="256"/>
             <p14:sldId id="257"/>
           </p14:sldIdLst>
         </p14:section>
-        <p14:section name="Passo 0: il ciclo di lavoro" id="{aec4a785-5289-cce8-16a0-eacb18fd611f}">
+        <p14:section name="Passo 0: il ciclo di lavoro" id="{1f36e9b0-3050-d569-2cc9-dcd3f6976ad3}">
           <p14:sldIdLst>
             <p14:sldId id="258"/>
             <p14:sldId id="259"/>
           </p14:sldIdLst>
         </p14:section>
-        <p14:section name="Passo 2: una griglia e una testa" id="{1c025bf8-719a-1870-fcfc-06a99aca0b36}">
+        <p14:section name="Passo 2: una griglia e una testa" id="{81e7d73b-eb08-e748-43e0-45073a0928d7}">
           <p14:sldIdLst>
             <p14:sldId id="260"/>
             <p14:sldId id="261"/>
@@ -145,18 +145,18 @@
             <p14:sldId id="264"/>
           </p14:sldIdLst>
         </p14:section>
-        <p14:section name="Passo 3: il movimento" id="{531ff26d-e765-644f-47c2-121078c5774b}">
+        <p14:section name="Passo 3: il movimento" id="{4849e915-4e70-f673-2b3c-87bce3331aee}">
           <p14:sldIdLst>
             <p14:sldId id="265"/>
             <p14:sldId id="266"/>
           </p14:sldIdLst>
         </p14:section>
-        <p14:section name="Passo 4: guardare dentro con PRG32-QT" id="{c26eb167-569a-ab07-34ea-8a29de948bf8}">
+        <p14:section name="Passo 4: guardare dentro con PRG32-QT" id="{91c16429-7495-1dda-2a15-b25d2500da1b}">
           <p14:sldIdLst>
             <p14:sldId id="267"/>
           </p14:sldIdLst>
         </p14:section>
-        <p14:section name="Eseguire e provare" id="{45f9ef7c-6cfc-8cf5-bd86-cc26fff46c96}">
+        <p14:section name="Eseguire e provare" id="{ad186ce1-8b91-b7c1-9ede-f621532b174d}">
           <p14:sldIdLst>
             <p14:sldId id="268"/>
             <p14:sldId id="269"/>
@@ -165,7 +165,7 @@
             <p14:sldId id="272"/>
           </p14:sldIdLst>
         </p14:section>
-        <p14:section name="Esercizi" id="{c82853e4-928f-fc49-bc6e-e6e6f21aea45}">
+        <p14:section name="Esercizi" id="{9336ecd3-9c12-f661-da29-dd5fdd1bfbb9}">
           <p14:sldIdLst>
             <p14:sldId id="273"/>
           </p14:sldIdLst>
@@ -576,7 +576,9 @@
               <a:rPr lang="en-US" dirty="0"/>
               <a:t>Questa è la presentazione del codice della Lezione 07. Mentre la presentazione della lezione sviluppa i concetti, questa raccoglie tutto ciò che si scrive e si esegue: ogni listato con il suo commento, il programma completo della lezione, il risultato che deve produrre, e la procedura per provarlo su ciascuno dei tre host. Le due presentazioni vanno lette insieme: i concetti spiegano il codice, e il codice dà ai concetti una conseguenza osservabile.
 Stato di apprendimento: DA COMPRENDERE OGGI, alla fine di questa lezione lo spiegate, lo seguite passo passo e lo applicate da soli; DA UTILIZZARE OGGI, oggi seguite e usate la ricetta; come funziona dentro si spiega più avanti, o non fa parte del corso; DA COMPRENDERE PIÙ AVANTI, riconoscete il nome e lo scopo; lo spiega una lezione successiva. Una slide senza etichetta è contesto: una storia, un esempio, una domanda, un esercizio.
-Stato di apprendimento di questa lezione. DA COMPRENDERE OGGI: il progetto Verm1; contratto init/update/draw; un colore è un numero; gli array in memoria; .text, .rodata, .data; indirizzo, valore, load, store; perché si salva ra; shift come moltiplicazione; la virgola fissa; le pseudo-istruzioni; l'ordine little-endian. DA UTILIZZARE OGGI: gli strumenti di PRG32, il debugger di PRG32-QT (si usa, non si studia, in questo corso). DA COMPRENDERE PIÙ AVANTI: formati delle istruzioni (Lezione 19). Una slide senza etichetta è contesto: una storia, un esempio, una domanda, un esercizio.</a:t>
+Stato di apprendimento di questa lezione. DA COMPRENDERE OGGI: il progetto Verm1; contratto init/update/draw; un colore è un numero; gli array in memoria; .text, .rodata, .data; indirizzo, valore, load, store; perché si salva ra; shift come moltiplicazione; la virgola fissa; le pseudo-istruzioni; l'ordine little-endian. DA UTILIZZARE OGGI: gli strumenti di PRG32, il debugger di PRG32-QT (si usa, non si studia, in questo corso). DA COMPRENDERE PIÙ AVANTI: formati delle istruzioni (Lezione 19). Una slide senza etichetta è contesto: una storia, un esempio, una domanda, un esercizio.
+Percorso. I risultati di oggi: (1) costruire una cartuccia da un file vuoto: una griglia, un titolo e una testa che si muove; (2) mettere costanti e variabili nella sezione giusta, .rodata o .data; (3) controllare una velocità con un accumulatore in virgola fissa. Si appoggia su: contratto init/update/draw (Lezione 02); un colore è un numero (Lezione 04); gli array in memoria (Lezione 04); indirizzo, valore, load, store (Lezione 02); perché si salva ra (Lezione 02). Prossimo passo: Lezione 08, Elementi di algebra di Boole.
+Ponte. Nella Lezione 02 il passo 2 salvava ra sullo stack prima delle sue chiamate, e lw t1, 0(t0) leggeva una parola all'indirizzo in t0. Oggi verm1_draw salva ra e verm1_update no, e ogni variabile di Verm1 si legge con la e lw. La Lezione 18 spiega lo stack e la convenzione di chiamata; la Lezione 19 nomina i modi di indirizzamento. Richiamo: Perché verm1_draw salva ra mentre verm1_update no?</a:t>
             </a:r>
             <a:endParaRPr lang="en-US" dirty="0"/>
           </a:p>
